--- a/dist/초5/수학/곱셈과어림/초5_수학_곱셈과어림_05_소수의곱셈.pptx
+++ b/dist/초5/수학/곱셈과어림/초5_수학_곱셈과어림_05_소수의곱셈.pptx
@@ -121,13 +121,13 @@
   <p:extLst>
     <p:ext uri="{521415D9-36F7-43E2-AB2F-B90AF26B5E84}">
       <p14:sectionLst xmlns:p14="http://schemas.microsoft.com/office/powerpoint/2010/main">
-        <p14:section name="도입" id="{a31c2a74-4d14-009c-b190-094a18ff6c92}">
+        <p14:section name="도입" id="{f4278b2f-2731-b3d8-ef13-9f4302e2e8f7}">
           <p14:sldIdLst>
             <p14:sldId id="256"/>
             <p14:sldId id="257"/>
           </p14:sldIdLst>
         </p14:section>
-        <p14:section name="개념" id="{51bfd4da-183f-0ff0-936a-cba92ade9a56}">
+        <p14:section name="개념" id="{a7a4befb-281f-587e-16f2-c91bec8cbd8b}">
           <p14:sldIdLst>
             <p14:sldId id="258"/>
             <p14:sldId id="259"/>
@@ -136,32 +136,32 @@
             <p14:sldId id="263"/>
           </p14:sldIdLst>
         </p14:section>
-        <p14:section name="연습" id="{2e31077b-3052-9b33-3ece-e473a1944bcf}">
+        <p14:section name="연습" id="{e8492624-6a70-74b6-6d46-d372e23dee48}">
           <p14:sldIdLst>
             <p14:sldId id="260"/>
             <p14:sldId id="264"/>
             <p14:sldId id="265"/>
           </p14:sldIdLst>
         </p14:section>
-        <p14:section name="개념" id="{04eb781b-a30f-b7af-adbf-8f541d845022}">
+        <p14:section name="개념" id="{318d173e-94ee-d22d-8030-41b97aaf81c1}">
           <p14:sldIdLst/>
         </p14:section>
-        <p14:section name="연습" id="{d989a656-dc7c-f4fe-ef76-97f7b8edba14}">
+        <p14:section name="연습" id="{2b675988-36e9-ac33-8341-48cdd087908c}">
           <p14:sldIdLst/>
         </p14:section>
-        <p14:section name="확인" id="{0be3c403-a83f-547f-25ee-47217b093250}">
+        <p14:section name="확인" id="{56281f72-851d-d433-4a31-3cf78e3d5041}">
           <p14:sldIdLst>
             <p14:sldId id="266"/>
             <p14:sldId id="267"/>
             <p14:sldId id="268"/>
           </p14:sldIdLst>
         </p14:section>
-        <p14:section name="정리" id="{b01ddec0-5358-4cbe-e879-b1a3631d93b2}">
+        <p14:section name="정리" id="{f6640f2f-66b5-08e5-b706-925c8dc58da4}">
           <p14:sldIdLst>
             <p14:sldId id="269"/>
           </p14:sldIdLst>
         </p14:section>
-        <p14:section name="보충" id="{b2bf94b4-488b-d255-7485-711fc2b2b0e0}">
+        <p14:section name="보충" id="{a6db6e5d-83cf-a1ae-1216-ec37b62292bd}">
           <p14:sldIdLst>
             <p14:sldId id="270"/>
           </p14:sldIdLst>
@@ -3464,12 +3464,12 @@
         </p:nvSpPr>
         <p:spPr>
           <a:xfrm>
-            <a:off x="548640" y="5021072"/>
-            <a:ext cx="11091672" cy="1196848"/>
+            <a:off x="548640" y="5349240"/>
+            <a:ext cx="11091672" cy="868680"/>
           </a:xfrm>
           <a:prstGeom prst="roundRect">
             <a:avLst>
-              <a:gd name="adj" fmla="val 9168"/>
+              <a:gd name="adj" fmla="val 12632"/>
             </a:avLst>
           </a:prstGeom>
           <a:solidFill>
@@ -3491,8 +3491,8 @@
         </p:nvSpPr>
         <p:spPr>
           <a:xfrm>
-            <a:off x="822960" y="5158232"/>
-            <a:ext cx="10543032" cy="922528"/>
+            <a:off x="822960" y="5486400"/>
+            <a:ext cx="10543032" cy="594360"/>
           </a:xfrm>
           <a:prstGeom prst="rect">
             <a:avLst/>
@@ -3519,7 +3519,7 @@
                 <a:ea typeface="맑은 고딕" pitchFamily="34" charset="-122"/>
                 <a:cs typeface="맑은 고딕" pitchFamily="34" charset="-120"/>
               </a:rPr>
-              <a:t>어림해 봐요. 1.2의 반(0.5배)은 6에 가까울까요, 0.6에 가까울까요?</a:t>
+              <a:t>1.2의 반(0.5배)은 6과 0.6 중 어디에 가까울까요?</a:t>
             </a:r>
             <a:endParaRPr lang="ko-KR" sz="2800" dirty="0"/>
           </a:p>
@@ -3581,7 +3581,7 @@
         <p:spPr>
           <a:xfrm>
             <a:off x="548640" y="3154680"/>
-            <a:ext cx="5362956" cy="1637792"/>
+            <a:ext cx="5362956" cy="1965960"/>
           </a:xfrm>
           <a:prstGeom prst="rect">
             <a:avLst/>
@@ -3701,7 +3701,7 @@
         <p:spPr>
           <a:xfrm>
             <a:off x="6277356" y="3154680"/>
-            <a:ext cx="5362956" cy="1637792"/>
+            <a:ext cx="5362956" cy="1965960"/>
           </a:xfrm>
           <a:prstGeom prst="rect">
             <a:avLst/>
@@ -5117,8 +5117,8 @@
       </p:sp>
       <p:sp>
         <p:nvSpPr>
-          <p:cNvPr id="7" name="S13-card168"/>
-          <p:cNvSpPr/>
+          <p:cNvPr id="7" name="S13-eqtext168"/>
+          <p:cNvSpPr txBox="1"/>
           <p:nvPr/>
         </p:nvSpPr>
         <p:spPr>
@@ -5126,33 +5126,6 @@
             <a:off x="548640" y="2715768"/>
             <a:ext cx="3453384" cy="2404872"/>
           </a:xfrm>
-          <a:prstGeom prst="roundRect">
-            <a:avLst>
-              <a:gd name="adj" fmla="val 4563"/>
-            </a:avLst>
-          </a:prstGeom>
-          <a:solidFill>
-            <a:srgbClr val="EAF3F1"/>
-          </a:solidFill>
-          <a:ln w="12700">
-            <a:solidFill>
-              <a:srgbClr val="EAF3F1"/>
-            </a:solidFill>
-            <a:prstDash val="solid"/>
-          </a:ln>
-        </p:spPr>
-      </p:sp>
-      <p:sp>
-        <p:nvSpPr>
-          <p:cNvPr id="8" name="S13-cardtext169"/>
-          <p:cNvSpPr txBox="1"/>
-          <p:nvPr/>
-        </p:nvSpPr>
-        <p:spPr>
-          <a:xfrm>
-            <a:off x="822960" y="2852928"/>
-            <a:ext cx="2904744" cy="2130552"/>
-          </a:xfrm>
           <a:prstGeom prst="rect">
             <a:avLst/>
           </a:prstGeom>
@@ -5163,14 +5136,11 @@
           <a:bodyPr wrap="square" lIns="0" tIns="0" rIns="0" bIns="0" rtlCol="0" anchor="ctr"/>
           <a:lstStyle/>
           <a:p>
-            <a:pPr eaLnBrk="0" indent="0" marL="0">
-              <a:spcAft>
-                <a:spcPts val="600"/>
-              </a:spcAft>
-              <a:buNone/>
-            </a:pPr>
-            <a:r>
-              <a:rPr lang="ko-KR" altLang="en-US" sz="2800" dirty="0">
+            <a:pPr eaLnBrk="0" algn="ctr" indent="0" marL="0">
+              <a:buNone/>
+            </a:pPr>
+            <a:r>
+              <a:rPr lang="ko-KR" altLang="en-US" sz="4800" b="1" dirty="0">
                 <a:solidFill>
                   <a:srgbClr val="1F2937"/>
                 </a:solidFill>
@@ -5180,13 +5150,13 @@
               </a:rPr>
               <a:t>46.8</a:t>
             </a:r>
-            <a:endParaRPr lang="ko-KR" sz="2800" dirty="0"/>
-          </a:p>
-        </p:txBody>
-      </p:sp>
-      <p:sp>
-        <p:nvSpPr>
-          <p:cNvPr id="9" name="S13-chip170"/>
+            <a:endParaRPr lang="ko-KR" sz="4800" dirty="0"/>
+          </a:p>
+        </p:txBody>
+      </p:sp>
+      <p:sp>
+        <p:nvSpPr>
+          <p:cNvPr id="8" name="S13-chip169"/>
           <p:cNvSpPr txBox="1"/>
           <p:nvPr/>
         </p:nvSpPr>
@@ -5233,8 +5203,8 @@
       </p:sp>
       <p:sp>
         <p:nvSpPr>
-          <p:cNvPr id="10" name="S13-card171"/>
-          <p:cNvSpPr/>
+          <p:cNvPr id="9" name="S13-eqtext170"/>
+          <p:cNvSpPr txBox="1"/>
           <p:nvPr/>
         </p:nvSpPr>
         <p:spPr>
@@ -5242,33 +5212,6 @@
             <a:off x="4367784" y="2715768"/>
             <a:ext cx="3453384" cy="2404872"/>
           </a:xfrm>
-          <a:prstGeom prst="roundRect">
-            <a:avLst>
-              <a:gd name="adj" fmla="val 4563"/>
-            </a:avLst>
-          </a:prstGeom>
-          <a:solidFill>
-            <a:srgbClr val="EAF3F1"/>
-          </a:solidFill>
-          <a:ln w="12700">
-            <a:solidFill>
-              <a:srgbClr val="EAF3F1"/>
-            </a:solidFill>
-            <a:prstDash val="solid"/>
-          </a:ln>
-        </p:spPr>
-      </p:sp>
-      <p:sp>
-        <p:nvSpPr>
-          <p:cNvPr id="11" name="S13-cardtext172"/>
-          <p:cNvSpPr txBox="1"/>
-          <p:nvPr/>
-        </p:nvSpPr>
-        <p:spPr>
-          <a:xfrm>
-            <a:off x="4642104" y="2852928"/>
-            <a:ext cx="2904744" cy="2130552"/>
-          </a:xfrm>
           <a:prstGeom prst="rect">
             <a:avLst/>
           </a:prstGeom>
@@ -5279,14 +5222,11 @@
           <a:bodyPr wrap="square" lIns="0" tIns="0" rIns="0" bIns="0" rtlCol="0" anchor="ctr"/>
           <a:lstStyle/>
           <a:p>
-            <a:pPr eaLnBrk="0" indent="0" marL="0">
-              <a:spcAft>
-                <a:spcPts val="600"/>
-              </a:spcAft>
-              <a:buNone/>
-            </a:pPr>
-            <a:r>
-              <a:rPr lang="ko-KR" altLang="en-US" sz="2800" dirty="0">
+            <a:pPr eaLnBrk="0" algn="ctr" indent="0" marL="0">
+              <a:buNone/>
+            </a:pPr>
+            <a:r>
+              <a:rPr lang="ko-KR" altLang="en-US" sz="4800" b="1" dirty="0">
                 <a:solidFill>
                   <a:srgbClr val="1F2937"/>
                 </a:solidFill>
@@ -5296,13 +5236,13 @@
               </a:rPr>
               <a:t>4.68</a:t>
             </a:r>
-            <a:endParaRPr lang="ko-KR" sz="2800" dirty="0"/>
-          </a:p>
-        </p:txBody>
-      </p:sp>
-      <p:sp>
-        <p:nvSpPr>
-          <p:cNvPr id="12" name="S13-chip173"/>
+            <a:endParaRPr lang="ko-KR" sz="4800" dirty="0"/>
+          </a:p>
+        </p:txBody>
+      </p:sp>
+      <p:sp>
+        <p:nvSpPr>
+          <p:cNvPr id="10" name="S13-chip171"/>
           <p:cNvSpPr txBox="1"/>
           <p:nvPr/>
         </p:nvSpPr>
@@ -5349,8 +5289,8 @@
       </p:sp>
       <p:sp>
         <p:nvSpPr>
-          <p:cNvPr id="13" name="S13-card174"/>
-          <p:cNvSpPr/>
+          <p:cNvPr id="11" name="S13-eqtext172"/>
+          <p:cNvSpPr txBox="1"/>
           <p:nvPr/>
         </p:nvSpPr>
         <p:spPr>
@@ -5358,33 +5298,6 @@
             <a:off x="8186928" y="2715768"/>
             <a:ext cx="3453384" cy="2404872"/>
           </a:xfrm>
-          <a:prstGeom prst="roundRect">
-            <a:avLst>
-              <a:gd name="adj" fmla="val 4563"/>
-            </a:avLst>
-          </a:prstGeom>
-          <a:solidFill>
-            <a:srgbClr val="EAF3F1"/>
-          </a:solidFill>
-          <a:ln w="12700">
-            <a:solidFill>
-              <a:srgbClr val="EAF3F1"/>
-            </a:solidFill>
-            <a:prstDash val="solid"/>
-          </a:ln>
-        </p:spPr>
-      </p:sp>
-      <p:sp>
-        <p:nvSpPr>
-          <p:cNvPr id="14" name="S13-cardtext175"/>
-          <p:cNvSpPr txBox="1"/>
-          <p:nvPr/>
-        </p:nvSpPr>
-        <p:spPr>
-          <a:xfrm>
-            <a:off x="8461248" y="2852928"/>
-            <a:ext cx="2904744" cy="2130552"/>
-          </a:xfrm>
           <a:prstGeom prst="rect">
             <a:avLst/>
           </a:prstGeom>
@@ -5395,14 +5308,11 @@
           <a:bodyPr wrap="square" lIns="0" tIns="0" rIns="0" bIns="0" rtlCol="0" anchor="ctr"/>
           <a:lstStyle/>
           <a:p>
-            <a:pPr eaLnBrk="0" indent="0" marL="0">
-              <a:spcAft>
-                <a:spcPts val="600"/>
-              </a:spcAft>
-              <a:buNone/>
-            </a:pPr>
-            <a:r>
-              <a:rPr lang="ko-KR" altLang="en-US" sz="2800" dirty="0">
+            <a:pPr eaLnBrk="0" algn="ctr" indent="0" marL="0">
+              <a:buNone/>
+            </a:pPr>
+            <a:r>
+              <a:rPr lang="ko-KR" altLang="en-US" sz="4800" b="1" dirty="0">
                 <a:solidFill>
                   <a:srgbClr val="1F2937"/>
                 </a:solidFill>
@@ -5412,7 +5322,7 @@
               </a:rPr>
               <a:t>0.468</a:t>
             </a:r>
-            <a:endParaRPr lang="ko-KR" sz="2800" dirty="0"/>
+            <a:endParaRPr lang="ko-KR" sz="4800" dirty="0"/>
           </a:p>
         </p:txBody>
       </p:sp>
@@ -5532,7 +5442,7 @@
       </p:sp>
       <p:sp>
         <p:nvSpPr>
-          <p:cNvPr id="3" name="S14-card176"/>
+          <p:cNvPr id="3" name="S14-card173"/>
           <p:cNvSpPr/>
           <p:nvPr/>
         </p:nvSpPr>
@@ -5559,7 +5469,7 @@
       </p:sp>
       <p:sp>
         <p:nvSpPr>
-          <p:cNvPr id="4" name="S14-cardtext177"/>
+          <p:cNvPr id="4" name="S14-cardtext174"/>
           <p:cNvSpPr txBox="1"/>
           <p:nvPr/>
         </p:nvSpPr>
@@ -5601,7 +5511,7 @@
       </p:sp>
       <p:sp>
         <p:nvSpPr>
-          <p:cNvPr id="5" name="S14-chip178"/>
+          <p:cNvPr id="5" name="S14-chip175"/>
           <p:cNvSpPr txBox="1"/>
           <p:nvPr/>
         </p:nvSpPr>
@@ -5648,7 +5558,7 @@
       </p:sp>
       <p:sp>
         <p:nvSpPr>
-          <p:cNvPr id="6" name="S14-chip179"/>
+          <p:cNvPr id="6" name="S14-chip176"/>
           <p:cNvSpPr txBox="1"/>
           <p:nvPr/>
         </p:nvSpPr>
@@ -5695,7 +5605,7 @@
       </p:sp>
       <p:sp>
         <p:nvSpPr>
-          <p:cNvPr id="7" name="S14-text180"/>
+          <p:cNvPr id="7" name="S14-text177"/>
           <p:cNvSpPr txBox="1"/>
           <p:nvPr/>
         </p:nvSpPr>
@@ -5734,7 +5644,7 @@
       </p:sp>
       <p:sp>
         <p:nvSpPr>
-          <p:cNvPr id="8" name="S14-eqtext181"/>
+          <p:cNvPr id="8" name="S14-eqtext178"/>
           <p:cNvSpPr txBox="1"/>
           <p:nvPr/>
         </p:nvSpPr>
@@ -5773,7 +5683,7 @@
       </p:sp>
       <p:sp>
         <p:nvSpPr>
-          <p:cNvPr id="9" name="S14-eqtext182"/>
+          <p:cNvPr id="9" name="S14-eqtext179"/>
           <p:cNvSpPr txBox="1"/>
           <p:nvPr/>
         </p:nvSpPr>
@@ -5812,7 +5722,7 @@
       </p:sp>
       <p:sp>
         <p:nvSpPr>
-          <p:cNvPr id="10" name="S14-eqtext183"/>
+          <p:cNvPr id="10" name="S14-eqtext180"/>
           <p:cNvSpPr txBox="1"/>
           <p:nvPr/>
         </p:nvSpPr>
@@ -5851,7 +5761,7 @@
       </p:sp>
       <p:sp>
         <p:nvSpPr>
-          <p:cNvPr id="11" name="S14-text184"/>
+          <p:cNvPr id="11" name="S14-text181"/>
           <p:cNvSpPr txBox="1"/>
           <p:nvPr/>
         </p:nvSpPr>
@@ -6004,7 +5914,7 @@
       </p:sp>
       <p:sp>
         <p:nvSpPr>
-          <p:cNvPr id="3" name="S15-text185"/>
+          <p:cNvPr id="3" name="S15-text182"/>
           <p:cNvSpPr txBox="1"/>
           <p:nvPr/>
         </p:nvSpPr>
@@ -6043,7 +5953,7 @@
       </p:sp>
       <p:sp>
         <p:nvSpPr>
-          <p:cNvPr id="4" name="S15-card186"/>
+          <p:cNvPr id="4" name="S15-card183"/>
           <p:cNvSpPr/>
           <p:nvPr/>
         </p:nvSpPr>
@@ -6070,7 +5980,7 @@
       </p:sp>
       <p:sp>
         <p:nvSpPr>
-          <p:cNvPr id="5" name="S15-cardtext187"/>
+          <p:cNvPr id="5" name="S15-cardtext184"/>
           <p:cNvSpPr txBox="1"/>
           <p:nvPr/>
         </p:nvSpPr>
@@ -6132,7 +6042,7 @@
       </p:sp>
       <p:sp>
         <p:nvSpPr>
-          <p:cNvPr id="6" name="S15-figure188" descr="0부터 1까지 0.1씩 눈금 수직선: 0에서 0.4씩 두 번 뛰어 0.8에 닿음"/>
+          <p:cNvPr id="6" name="S15-figure185" descr="0부터 1까지 0.1씩 눈금 수직선: 0에서 0.4씩 두 번 뛰어 0.8에 닿음"/>
           <p:cNvSpPr/>
           <p:nvPr/>
         </p:nvSpPr>
@@ -6157,7 +6067,7 @@
       </p:sp>
       <p:sp>
         <p:nvSpPr>
-          <p:cNvPr id="7" name="S15-mark189"/>
+          <p:cNvPr id="7" name="S15-mark186"/>
           <p:cNvSpPr/>
           <p:nvPr/>
         </p:nvSpPr>
@@ -6182,7 +6092,7 @@
       </p:sp>
       <p:sp>
         <p:nvSpPr>
-          <p:cNvPr id="8" name="S15-mark190"/>
+          <p:cNvPr id="8" name="S15-mark187"/>
           <p:cNvSpPr/>
           <p:nvPr/>
         </p:nvSpPr>
@@ -6205,7 +6115,7 @@
       </p:sp>
       <p:sp>
         <p:nvSpPr>
-          <p:cNvPr id="9" name="S15-mark191"/>
+          <p:cNvPr id="9" name="S15-mark188"/>
           <p:cNvSpPr/>
           <p:nvPr/>
         </p:nvSpPr>
@@ -6228,7 +6138,7 @@
       </p:sp>
       <p:sp>
         <p:nvSpPr>
-          <p:cNvPr id="10" name="S15-mark192"/>
+          <p:cNvPr id="10" name="S15-mark189"/>
           <p:cNvSpPr/>
           <p:nvPr/>
         </p:nvSpPr>
@@ -6251,7 +6161,7 @@
       </p:sp>
       <p:sp>
         <p:nvSpPr>
-          <p:cNvPr id="11" name="S15-mark193"/>
+          <p:cNvPr id="11" name="S15-mark190"/>
           <p:cNvSpPr/>
           <p:nvPr/>
         </p:nvSpPr>
@@ -6274,7 +6184,7 @@
       </p:sp>
       <p:sp>
         <p:nvSpPr>
-          <p:cNvPr id="12" name="S15-mark194"/>
+          <p:cNvPr id="12" name="S15-mark191"/>
           <p:cNvSpPr/>
           <p:nvPr/>
         </p:nvSpPr>
@@ -6297,7 +6207,7 @@
       </p:sp>
       <p:sp>
         <p:nvSpPr>
-          <p:cNvPr id="13" name="S15-mark195"/>
+          <p:cNvPr id="13" name="S15-mark192"/>
           <p:cNvSpPr/>
           <p:nvPr/>
         </p:nvSpPr>
@@ -6320,7 +6230,7 @@
       </p:sp>
       <p:sp>
         <p:nvSpPr>
-          <p:cNvPr id="14" name="S15-mark196"/>
+          <p:cNvPr id="14" name="S15-mark193"/>
           <p:cNvSpPr/>
           <p:nvPr/>
         </p:nvSpPr>
@@ -6343,7 +6253,7 @@
       </p:sp>
       <p:sp>
         <p:nvSpPr>
-          <p:cNvPr id="15" name="S15-mark197"/>
+          <p:cNvPr id="15" name="S15-mark194"/>
           <p:cNvSpPr/>
           <p:nvPr/>
         </p:nvSpPr>
@@ -6366,7 +6276,7 @@
       </p:sp>
       <p:sp>
         <p:nvSpPr>
-          <p:cNvPr id="16" name="S15-mark198"/>
+          <p:cNvPr id="16" name="S15-mark195"/>
           <p:cNvSpPr/>
           <p:nvPr/>
         </p:nvSpPr>
@@ -6389,7 +6299,7 @@
       </p:sp>
       <p:sp>
         <p:nvSpPr>
-          <p:cNvPr id="17" name="S15-mark199"/>
+          <p:cNvPr id="17" name="S15-mark196"/>
           <p:cNvSpPr/>
           <p:nvPr/>
         </p:nvSpPr>
@@ -6412,7 +6322,7 @@
       </p:sp>
       <p:sp>
         <p:nvSpPr>
-          <p:cNvPr id="18" name="S15-mark200"/>
+          <p:cNvPr id="18" name="S15-mark197"/>
           <p:cNvSpPr/>
           <p:nvPr/>
         </p:nvSpPr>
@@ -6435,7 +6345,7 @@
       </p:sp>
       <p:sp>
         <p:nvSpPr>
-          <p:cNvPr id="19" name="S15-mark201"/>
+          <p:cNvPr id="19" name="S15-mark198"/>
           <p:cNvSpPr/>
           <p:nvPr/>
         </p:nvSpPr>
@@ -6458,7 +6368,7 @@
       </p:sp>
       <p:sp>
         <p:nvSpPr>
-          <p:cNvPr id="20" name="S15-mark202"/>
+          <p:cNvPr id="20" name="S15-mark199"/>
           <p:cNvSpPr/>
           <p:nvPr/>
         </p:nvSpPr>
@@ -6482,7 +6392,7 @@
       </p:sp>
       <p:sp>
         <p:nvSpPr>
-          <p:cNvPr id="21" name="S15-mark203"/>
+          <p:cNvPr id="21" name="S15-mark200"/>
           <p:cNvSpPr/>
           <p:nvPr/>
         </p:nvSpPr>
@@ -6505,7 +6415,7 @@
       </p:sp>
       <p:sp>
         <p:nvSpPr>
-          <p:cNvPr id="22" name="S15-mark204"/>
+          <p:cNvPr id="22" name="S15-mark201"/>
           <p:cNvSpPr/>
           <p:nvPr/>
         </p:nvSpPr>
@@ -6529,7 +6439,7 @@
       </p:sp>
       <p:sp>
         <p:nvSpPr>
-          <p:cNvPr id="23" name="S15-label206"/>
+          <p:cNvPr id="23" name="S15-label203"/>
           <p:cNvSpPr txBox="1"/>
           <p:nvPr/>
         </p:nvSpPr>
@@ -6568,7 +6478,7 @@
       </p:sp>
       <p:sp>
         <p:nvSpPr>
-          <p:cNvPr id="24" name="S15-label208"/>
+          <p:cNvPr id="24" name="S15-label205"/>
           <p:cNvSpPr txBox="1"/>
           <p:nvPr/>
         </p:nvSpPr>
@@ -6607,7 +6517,7 @@
       </p:sp>
       <p:sp>
         <p:nvSpPr>
-          <p:cNvPr id="25" name="S15-label210"/>
+          <p:cNvPr id="25" name="S15-label207"/>
           <p:cNvSpPr txBox="1"/>
           <p:nvPr/>
         </p:nvSpPr>
@@ -6646,7 +6556,7 @@
       </p:sp>
       <p:sp>
         <p:nvSpPr>
-          <p:cNvPr id="26" name="S15-label212"/>
+          <p:cNvPr id="26" name="S15-label209"/>
           <p:cNvSpPr txBox="1"/>
           <p:nvPr/>
         </p:nvSpPr>
@@ -6685,7 +6595,7 @@
       </p:sp>
       <p:sp>
         <p:nvSpPr>
-          <p:cNvPr id="27" name="S15-label214"/>
+          <p:cNvPr id="27" name="S15-label211"/>
           <p:cNvSpPr txBox="1"/>
           <p:nvPr/>
         </p:nvSpPr>
@@ -6724,7 +6634,7 @@
       </p:sp>
       <p:sp>
         <p:nvSpPr>
-          <p:cNvPr id="28" name="S15-label216"/>
+          <p:cNvPr id="28" name="S15-label213"/>
           <p:cNvSpPr txBox="1"/>
           <p:nvPr/>
         </p:nvSpPr>

--- a/dist/초5/수학/곱셈과어림/초5_수학_곱셈과어림_05_소수의곱셈.pptx
+++ b/dist/초5/수학/곱셈과어림/초5_수학_곱셈과어림_05_소수의곱셈.pptx
@@ -121,13 +121,13 @@
   <p:extLst>
     <p:ext uri="{521415D9-36F7-43E2-AB2F-B90AF26B5E84}">
       <p14:sectionLst xmlns:p14="http://schemas.microsoft.com/office/powerpoint/2010/main">
-        <p14:section name="도입" id="{f4278b2f-2731-b3d8-ef13-9f4302e2e8f7}">
+        <p14:section name="도입" id="{63bcfde5-af72-f2a7-48c5-2a68d9b0cda2}">
           <p14:sldIdLst>
             <p14:sldId id="256"/>
             <p14:sldId id="257"/>
           </p14:sldIdLst>
         </p14:section>
-        <p14:section name="개념" id="{a7a4befb-281f-587e-16f2-c91bec8cbd8b}">
+        <p14:section name="개념" id="{ac910bda-645f-182d-b33a-3b0773e2aea2}">
           <p14:sldIdLst>
             <p14:sldId id="258"/>
             <p14:sldId id="259"/>
@@ -136,32 +136,32 @@
             <p14:sldId id="263"/>
           </p14:sldIdLst>
         </p14:section>
-        <p14:section name="연습" id="{e8492624-6a70-74b6-6d46-d372e23dee48}">
+        <p14:section name="연습" id="{e6cecb0d-5e00-0848-11f0-e8c64b920499}">
           <p14:sldIdLst>
             <p14:sldId id="260"/>
             <p14:sldId id="264"/>
             <p14:sldId id="265"/>
           </p14:sldIdLst>
         </p14:section>
-        <p14:section name="개념" id="{318d173e-94ee-d22d-8030-41b97aaf81c1}">
+        <p14:section name="개념" id="{6f87c20f-a357-f194-b2e9-0794bb50cb85}">
           <p14:sldIdLst/>
         </p14:section>
-        <p14:section name="연습" id="{2b675988-36e9-ac33-8341-48cdd087908c}">
+        <p14:section name="연습" id="{7cb7459a-153e-9cff-fdc7-8a997d0fd995}">
           <p14:sldIdLst/>
         </p14:section>
-        <p14:section name="확인" id="{56281f72-851d-d433-4a31-3cf78e3d5041}">
+        <p14:section name="확인" id="{994c510a-b307-0621-3cc0-8e212d4c65a0}">
           <p14:sldIdLst>
             <p14:sldId id="266"/>
             <p14:sldId id="267"/>
             <p14:sldId id="268"/>
           </p14:sldIdLst>
         </p14:section>
-        <p14:section name="정리" id="{f6640f2f-66b5-08e5-b706-925c8dc58da4}">
+        <p14:section name="정리" id="{12a36fb0-f567-683e-74e1-35c7d248b071}">
           <p14:sldIdLst>
             <p14:sldId id="269"/>
           </p14:sldIdLst>
         </p14:section>
-        <p14:section name="보충" id="{a6db6e5d-83cf-a1ae-1216-ec37b62292bd}">
+        <p14:section name="보충" id="{e62e1e9b-a719-fab0-25e6-5fcb31f5f7aa}">
           <p14:sldIdLst>
             <p14:sldId id="270"/>
           </p14:sldIdLst>
